--- a/assets/pptx/catalog-189.pptx
+++ b/assets/pptx/catalog-189.pptx
@@ -3494,7 +3494,7 @@
                 <a:ea typeface="Ebrima"/>
                 <a:cs typeface="Ebrima"/>
               </a:rPr>
-              <a:t>የዝማሬው ጉልበት ያለው በአፌ ላይ (2x)</a:t>
+              <a:t>የዝማሬው ጉልበት ያለው በአፌ ላይ 2x</a:t>
             </a:r>
           </a:p>
           <a:p>
@@ -3633,7 +3633,7 @@
                 <a:ea typeface="Ebrima"/>
                 <a:cs typeface="Ebrima"/>
               </a:rPr>
-              <a:t>የዝማሬው ቅባት ያለው በእኔ ላይ (2x)</a:t>
+              <a:t>የዝማሬው ቅባት ያለው በእኔ ላይ 2x</a:t>
             </a:r>
           </a:p>
           <a:p>
@@ -3772,7 +3772,7 @@
                 <a:ea typeface="Ebrima"/>
                 <a:cs typeface="Ebrima"/>
               </a:rPr>
-              <a:t>የዝማሬው ጉልበት ያለው በአፌ ላይ (2x)</a:t>
+              <a:t>የዝማሬው ጉልበት ያለው በአፌ ላይ 2x</a:t>
             </a:r>
           </a:p>
           <a:p>
@@ -3911,7 +3911,7 @@
                 <a:ea typeface="Ebrima"/>
                 <a:cs typeface="Ebrima"/>
               </a:rPr>
-              <a:t>የዝማሬው ቅባት ያለው በእኔ ላይ (2x)</a:t>
+              <a:t>የዝማሬው ቅባት ያለው በእኔ ላይ 2x</a:t>
             </a:r>
           </a:p>
           <a:p>
@@ -4413,7 +4413,7 @@
                 <a:ea typeface="Ebrima"/>
                 <a:cs typeface="Ebrima"/>
               </a:rPr>
-              <a:t>የዝማሬው ጉልበት ያለው በአፌ ላይ (2x)</a:t>
+              <a:t>የዝማሬው ጉልበት ያለው በአፌ ላይ 2x</a:t>
             </a:r>
           </a:p>
           <a:p>
@@ -4552,7 +4552,7 @@
                 <a:ea typeface="Ebrima"/>
                 <a:cs typeface="Ebrima"/>
               </a:rPr>
-              <a:t>የዝማሬው ቅባት ያለው በእኔ ላይ (2x)</a:t>
+              <a:t>የዝማሬው ቅባት ያለው በእኔ ላይ 2x</a:t>
             </a:r>
           </a:p>
           <a:p>
